--- a/docs/lectures/4/slides.pptx
+++ b/docs/lectures/4/slides.pptx
@@ -253,7 +253,7 @@
           <a:p>
             <a:fld id="{2D115012-AC41-40DA-B329-F5A00A83611C}" type="datetimeFigureOut">
               <a:rPr lang="en-GB" smtClean="0"/>
-              <a:t>14/10/2026</a:t>
+              <a:t>15/10/2026</a:t>
             </a:fld>
             <a:endParaRPr lang="en-GB"/>
           </a:p>
@@ -3277,7 +3277,7 @@
           <a:p>
             <a:fld id="{E2E8F11D-89F6-48AA-9160-79A3A2AE5DF7}" type="datetime1">
               <a:rPr lang="en-US" smtClean="0"/>
-              <a:t>10/14/26</a:t>
+              <a:t>10/15/26</a:t>
             </a:fld>
             <a:endParaRPr lang="en-US" dirty="0"/>
           </a:p>
@@ -3471,7 +3471,7 @@
           <a:p>
             <a:fld id="{A8723208-FF0B-4AFB-8054-93F500DA18A8}" type="datetime1">
               <a:rPr lang="en-US" smtClean="0"/>
-              <a:t>10/14/26</a:t>
+              <a:t>10/15/26</a:t>
             </a:fld>
             <a:endParaRPr lang="en-US" dirty="0"/>
           </a:p>
@@ -3702,7 +3702,7 @@
           <a:p>
             <a:fld id="{C69DBF55-F4DF-4357-A8DE-459458C82B3F}" type="datetime1">
               <a:rPr lang="en-US" smtClean="0"/>
-              <a:t>10/14/26</a:t>
+              <a:t>10/15/26</a:t>
             </a:fld>
             <a:endParaRPr lang="en-US"/>
           </a:p>
@@ -3867,7 +3867,7 @@
           <a:p>
             <a:fld id="{C97DC9A2-3BBA-4DCE-968F-9F5DD2AE57CF}" type="datetime1">
               <a:rPr lang="en-US" smtClean="0"/>
-              <a:t>10/14/26</a:t>
+              <a:t>10/15/26</a:t>
             </a:fld>
             <a:endParaRPr lang="en-US"/>
           </a:p>
@@ -4003,7 +4003,7 @@
           <a:p>
             <a:fld id="{2712E82C-F853-4BFE-B969-3B6DD87F82CC}" type="datetime1">
               <a:rPr lang="en-US" smtClean="0"/>
-              <a:t>10/14/26</a:t>
+              <a:t>10/15/26</a:t>
             </a:fld>
             <a:endParaRPr lang="en-US"/>
           </a:p>
@@ -4245,7 +4245,7 @@
           <a:p>
             <a:fld id="{B84E3801-CF39-4F03-BE01-3A41319F2C7A}" type="datetime1">
               <a:rPr lang="en-US" smtClean="0"/>
-              <a:t>10/14/26</a:t>
+              <a:t>10/15/26</a:t>
             </a:fld>
             <a:endParaRPr lang="en-US" dirty="0"/>
           </a:p>
@@ -4693,7 +4693,7 @@
                 </a:highlight>
                 <a:latin typeface="Comic Sans MS" panose="030F0902030302020204" pitchFamily="66" charset="0"/>
               </a:rPr>
-              <a:t>jo.hallett@bristol.ac.uk</a:t>
+              <a:t>gretch.hallett@bristol.ac.uk</a:t>
             </a:r>
             <a:endParaRPr lang="en-US" dirty="0">
               <a:highlight>
